--- a/scenarios/S06_vlb_ico_marketing/deliverables/VLB_ICO_IR_덱.pptx
+++ b/scenarios/S06_vlb_ico_marketing/deliverables/VLB_ICO_IR_덱.pptx
@@ -13,6 +13,12 @@
     <p:sldId id="261" r:id="rId12"/>
     <p:sldId id="262" r:id="rId13"/>
     <p:sldId id="263" r:id="rId14"/>
+    <p:sldId id="264" r:id="rId15"/>
+    <p:sldId id="265" r:id="rId16"/>
+    <p:sldId id="266" r:id="rId17"/>
+    <p:sldId id="267" r:id="rId18"/>
+    <p:sldId id="268" r:id="rId19"/>
+    <p:sldId id="269" r:id="rId20"/>
   </p:sldIdLst>
   <p:sldSz cx="9144000" cy="6858000" type="screen4x3"/>
   <p:notesSz cx="6858000" cy="9144000"/>
@@ -3145,6 +3151,426 @@
 </p:sld>
 </file>
 
+<file path=ppt/slides/slide10.xml><?xml version="1.0" encoding="utf-8"?>
+<p:sld xmlns:a="http://schemas.openxmlformats.org/drawingml/2006/main" xmlns:p="http://schemas.openxmlformats.org/presentationml/2006/main" xmlns:r="http://schemas.openxmlformats.org/officeDocument/2006/relationships">
+  <p:cSld>
+    <p:spTree>
+      <p:nvGrpSpPr>
+        <p:cNvPr id="1" name=""/>
+        <p:cNvGrpSpPr/>
+        <p:nvPr/>
+      </p:nvGrpSpPr>
+      <p:grpSpPr/>
+      <p:sp>
+        <p:nvSpPr>
+          <p:cNvPr id="2" name="Title 1"/>
+          <p:cNvSpPr>
+            <a:spLocks noGrp="1"/>
+          </p:cNvSpPr>
+          <p:nvPr>
+            <p:ph type="title"/>
+          </p:nvPr>
+        </p:nvSpPr>
+        <p:spPr/>
+        <p:txBody>
+          <a:bodyPr/>
+          <a:lstStyle/>
+          <a:p>
+            <a:r>
+              <a:t>변경 이력: 러시아 ETH 기반 VLB ICO 실행 결과</a:t>
+            </a:r>
+          </a:p>
+        </p:txBody>
+      </p:sp>
+      <p:sp>
+        <p:nvSpPr>
+          <p:cNvPr id="3" name="Content Placeholder 2"/>
+          <p:cNvSpPr>
+            <a:spLocks noGrp="1"/>
+          </p:cNvSpPr>
+          <p:nvPr>
+            <p:ph idx="1"/>
+          </p:nvPr>
+        </p:nvSpPr>
+        <p:spPr/>
+        <p:txBody>
+          <a:bodyPr/>
+          <a:lstStyle/>
+          <a:p>
+            <a:r>
+              <a:t>러시아 및 ETH 생태계 타깃, 핵심 메시지, 공식 채널 및 콘텐츠 승인 절차 반영</a:t>
+            </a:r>
+          </a:p>
+          <a:p>
+            <a:pPr>
+              <a:defRPr sz="1400"/>
+            </a:pPr>
+            <a:r>
+              <a:t>백서 최종 승인본·러시아어 번역·접근성·버전 및 변경 이력 관리 추가</a:t>
+            </a:r>
+          </a:p>
+          <a:p>
+            <a:pPr>
+              <a:defRPr sz="1400"/>
+            </a:pPr>
+            <a:r>
+              <a:t>투자자 가입·거주지 확인·KYC/AML·개인정보 처리 및 문의 대응 절차 추가</a:t>
+            </a:r>
+          </a:p>
+          <a:p>
+            <a:pPr>
+              <a:defRPr sz="1400"/>
+            </a:pPr>
+            <a:r>
+              <a:t>토큰 세일 일정·가격·할당량·ETH 결제·환불 조건 및 공식 변경 공지 절차 추가</a:t>
+            </a:r>
+          </a:p>
+          <a:p>
+            <a:pPr>
+              <a:defRPr sz="1400"/>
+            </a:pPr>
+            <a:r>
+              <a:t>법률·컴플라이언스·보안 승인과 증적 확보 전 백서 공개·모집·일정 공지 보류</a:t>
+            </a:r>
+          </a:p>
+          <a:p>
+            <a:pPr>
+              <a:defRPr sz="1400"/>
+            </a:pPr>
+            <a:r>
+              <a:t>공식 채널 사칭·피싱 방지, 일정 불일치 방지 및 위기 커뮤니케이션 담당자 지정</a:t>
+            </a:r>
+          </a:p>
+        </p:txBody>
+      </p:sp>
+    </p:spTree>
+  </p:cSld>
+  <p:clrMapOvr>
+    <a:masterClrMapping/>
+  </p:clrMapOvr>
+</p:sld>
+</file>
+
+<file path=ppt/slides/slide11.xml><?xml version="1.0" encoding="utf-8"?>
+<p:sld xmlns:a="http://schemas.openxmlformats.org/drawingml/2006/main" xmlns:p="http://schemas.openxmlformats.org/presentationml/2006/main" xmlns:r="http://schemas.openxmlformats.org/officeDocument/2006/relationships">
+  <p:cSld>
+    <p:spTree>
+      <p:nvGrpSpPr>
+        <p:cNvPr id="1" name=""/>
+        <p:cNvGrpSpPr/>
+        <p:nvPr/>
+      </p:nvGrpSpPr>
+      <p:grpSpPr/>
+      <p:sp>
+        <p:nvSpPr>
+          <p:cNvPr id="2" name="Title 1"/>
+          <p:cNvSpPr>
+            <a:spLocks noGrp="1"/>
+          </p:cNvSpPr>
+          <p:nvPr>
+            <p:ph type="title"/>
+          </p:nvPr>
+        </p:nvSpPr>
+        <p:spPr/>
+        <p:txBody>
+          <a:bodyPr/>
+          <a:lstStyle/>
+          <a:p>
+            <a:r>
+              <a:t>변경 이력 · ICO 외부 커뮤니케이션 승인 통제</a:t>
+            </a:r>
+          </a:p>
+        </p:txBody>
+      </p:sp>
+      <p:sp>
+        <p:nvSpPr>
+          <p:cNvPr id="3" name="Content Placeholder 2"/>
+          <p:cNvSpPr>
+            <a:spLocks noGrp="1"/>
+          </p:cNvSpPr>
+          <p:nvPr>
+            <p:ph idx="1"/>
+          </p:nvPr>
+        </p:nvSpPr>
+        <p:spPr/>
+        <p:txBody>
+          <a:bodyPr/>
+          <a:lstStyle/>
+          <a:p>
+            <a:r>
+              <a:t>러시아 및 ETH 생태계 대상 마케팅, 백서 배포, KYC/AML, 토큰 세일 일정 커뮤니케이션 범위를 반영</a:t>
+            </a:r>
+          </a:p>
+          <a:p>
+            <a:pPr>
+              <a:defRPr sz="1400"/>
+            </a:pPr>
+            <a:r>
+              <a:t>토큰 법적 분류·허용 관할권·제재 제한·개인정보 처리·스마트컨트랙트 보안·공식 채널 통제 승인 전 외부 공개·모집·일정 공지 보류</a:t>
+            </a:r>
+          </a:p>
+          <a:p>
+            <a:pPr>
+              <a:defRPr sz="1400"/>
+            </a:pPr>
+            <a:r>
+              <a:t>백서 버전·러시아어 번역·공식 채널 간 정보 일관성 검증과 피싱·허위 프로모션 방지 통제 추가</a:t>
+            </a:r>
+          </a:p>
+        </p:txBody>
+      </p:sp>
+    </p:spTree>
+  </p:cSld>
+  <p:clrMapOvr>
+    <a:masterClrMapping/>
+  </p:clrMapOvr>
+</p:sld>
+</file>
+
+<file path=ppt/slides/slide12.xml><?xml version="1.0" encoding="utf-8"?>
+<p:sld xmlns:a="http://schemas.openxmlformats.org/drawingml/2006/main" xmlns:p="http://schemas.openxmlformats.org/presentationml/2006/main" xmlns:r="http://schemas.openxmlformats.org/officeDocument/2006/relationships">
+  <p:cSld>
+    <p:spTree>
+      <p:nvGrpSpPr>
+        <p:cNvPr id="1" name=""/>
+        <p:cNvGrpSpPr/>
+        <p:nvPr/>
+      </p:nvGrpSpPr>
+      <p:grpSpPr/>
+      <p:sp>
+        <p:nvSpPr>
+          <p:cNvPr id="2" name="Title 1"/>
+          <p:cNvSpPr>
+            <a:spLocks noGrp="1"/>
+          </p:cNvSpPr>
+          <p:nvPr>
+            <p:ph type="title"/>
+          </p:nvPr>
+        </p:nvSpPr>
+        <p:spPr/>
+        <p:txBody>
+          <a:bodyPr/>
+          <a:lstStyle/>
+          <a:p>
+            <a:r>
+              <a:t>변경 이력 — ICO 승인 게이트 및 외부 공개 보류</a:t>
+            </a:r>
+          </a:p>
+        </p:txBody>
+      </p:sp>
+      <p:sp>
+        <p:nvSpPr>
+          <p:cNvPr id="3" name="Content Placeholder 2"/>
+          <p:cNvSpPr>
+            <a:spLocks noGrp="1"/>
+          </p:cNvSpPr>
+          <p:nvPr>
+            <p:ph idx="1"/>
+          </p:nvPr>
+        </p:nvSpPr>
+        <p:spPr/>
+        <p:txBody>
+          <a:bodyPr/>
+          <a:lstStyle/>
+          <a:p>
+            <a:r>
+              <a:t>러시아·ETH 대상 마케팅, 백서 배포, KYC/AML 및 토큰 세일 공지 계획을 추가하고 공식 채널 간 정보 일관성 검증을 요구한다.</a:t>
+            </a:r>
+          </a:p>
+          <a:p>
+            <a:pPr>
+              <a:defRPr sz="1400"/>
+            </a:pPr>
+            <a:r>
+              <a:t>관할권별 법률·컴플라이언스·보안·운영 증적과 스마트컨트랙트·결제·환불·개인정보 통제가 확보되기 전까지 백서 공개, 투자자 모집, 일정 공지를 보류한다.</a:t>
+            </a:r>
+          </a:p>
+          <a:p>
+            <a:pPr>
+              <a:defRPr sz="1400"/>
+            </a:pPr>
+            <a:r>
+              <a:t>제재 대상자 제한, 판매 중지 기준, 하드캡 조기 종료·락업 조건, 후보 거래소 비확정 문구 및 위기 커뮤니케이션 책임자를 추적한다.</a:t>
+            </a:r>
+          </a:p>
+        </p:txBody>
+      </p:sp>
+    </p:spTree>
+  </p:cSld>
+  <p:clrMapOvr>
+    <a:masterClrMapping/>
+  </p:clrMapOvr>
+</p:sld>
+</file>
+
+<file path=ppt/slides/slide13.xml><?xml version="1.0" encoding="utf-8"?>
+<p:sld xmlns:a="http://schemas.openxmlformats.org/drawingml/2006/main" xmlns:p="http://schemas.openxmlformats.org/presentationml/2006/main" xmlns:r="http://schemas.openxmlformats.org/officeDocument/2006/relationships">
+  <p:cSld>
+    <p:spTree>
+      <p:nvGrpSpPr>
+        <p:cNvPr id="1" name=""/>
+        <p:cNvGrpSpPr/>
+        <p:nvPr/>
+      </p:nvGrpSpPr>
+      <p:grpSpPr/>
+      <p:sp>
+        <p:nvSpPr>
+          <p:cNvPr id="2" name="Title 1"/>
+          <p:cNvSpPr>
+            <a:spLocks noGrp="1"/>
+          </p:cNvSpPr>
+          <p:nvPr>
+            <p:ph type="title"/>
+          </p:nvPr>
+        </p:nvSpPr>
+        <p:spPr/>
+        <p:txBody>
+          <a:bodyPr/>
+          <a:lstStyle/>
+          <a:p>
+            <a:r>
+              <a:t>변경 이력 · 조건부 승인</a:t>
+            </a:r>
+          </a:p>
+        </p:txBody>
+      </p:sp>
+      <p:sp>
+        <p:nvSpPr>
+          <p:cNvPr id="3" name="Content Placeholder 2"/>
+          <p:cNvSpPr>
+            <a:spLocks noGrp="1"/>
+          </p:cNvSpPr>
+          <p:nvPr>
+            <p:ph idx="1"/>
+          </p:nvPr>
+        </p:nvSpPr>
+        <p:spPr/>
+        <p:txBody>
+          <a:bodyPr/>
+          <a:lstStyle/>
+          <a:p>
+            <a:r>
+              <a:t>러시아·ETH 생태계 대상 마케팅, 백서 배포, KYC/AML 및 세일 일정 커뮤니케이션 범위를 반영</a:t>
+            </a:r>
+          </a:p>
+          <a:p>
+            <a:pPr>
+              <a:defRPr sz="1400"/>
+            </a:pPr>
+            <a:r>
+              <a:t>법률·컴플라이언스·보안·운영 승인과 스마트컨트랙트 점검 전 외부 공개·모집·일정 공지 보류</a:t>
+            </a:r>
+          </a:p>
+          <a:p>
+            <a:pPr>
+              <a:defRPr sz="1400"/>
+            </a:pPr>
+            <a:r>
+              <a:t>하드캡 조기 종료·락업 스케줄 일관성 검증 및 후보 거래소의 법률·컴플라이언스 검토 필요</a:t>
+            </a:r>
+          </a:p>
+          <a:p>
+            <a:pPr>
+              <a:defRPr sz="1400"/>
+            </a:pPr>
+            <a:r>
+              <a:t>변경 공지 승인자, 판매 중지 결정권자 및 위기 커뮤니케이션 담당자 추적 필요</a:t>
+            </a:r>
+          </a:p>
+        </p:txBody>
+      </p:sp>
+    </p:spTree>
+  </p:cSld>
+  <p:clrMapOvr>
+    <a:masterClrMapping/>
+  </p:clrMapOvr>
+</p:sld>
+</file>
+
+<file path=ppt/slides/slide14.xml><?xml version="1.0" encoding="utf-8"?>
+<p:sld xmlns:a="http://schemas.openxmlformats.org/drawingml/2006/main" xmlns:p="http://schemas.openxmlformats.org/presentationml/2006/main" xmlns:r="http://schemas.openxmlformats.org/officeDocument/2006/relationships">
+  <p:cSld>
+    <p:spTree>
+      <p:nvGrpSpPr>
+        <p:cNvPr id="1" name=""/>
+        <p:cNvGrpSpPr/>
+        <p:nvPr/>
+      </p:nvGrpSpPr>
+      <p:grpSpPr/>
+      <p:sp>
+        <p:nvSpPr>
+          <p:cNvPr id="2" name="Title 1"/>
+          <p:cNvSpPr>
+            <a:spLocks noGrp="1"/>
+          </p:cNvSpPr>
+          <p:nvPr>
+            <p:ph type="title"/>
+          </p:nvPr>
+        </p:nvSpPr>
+        <p:spPr/>
+        <p:txBody>
+          <a:bodyPr/>
+          <a:lstStyle/>
+          <a:p>
+            <a:r>
+              <a:t>변경 이력 — REQ-20250308-RU-ETH-VLB-ICO-EXECUTION</a:t>
+            </a:r>
+          </a:p>
+        </p:txBody>
+      </p:sp>
+      <p:sp>
+        <p:nvSpPr>
+          <p:cNvPr id="3" name="Content Placeholder 2"/>
+          <p:cNvSpPr>
+            <a:spLocks noGrp="1"/>
+          </p:cNvSpPr>
+          <p:nvPr>
+            <p:ph idx="1"/>
+          </p:nvPr>
+        </p:nvSpPr>
+        <p:spPr/>
+        <p:txBody>
+          <a:bodyPr/>
+          <a:lstStyle/>
+          <a:p>
+            <a:r>
+              <a:t>러시아·ETH 생태계 대상 마케팅, 백서 배포, KYC/AML, 토큰 세일 일정 공지 통제를 반영</a:t>
+            </a:r>
+          </a:p>
+          <a:p>
+            <a:pPr>
+              <a:defRPr sz="1400"/>
+            </a:pPr>
+            <a:r>
+              <a:t>VLB 토큰 법적 분류·판매 허용 관할권·제재 및 개인정보 통제를 추적 항목으로 추가</a:t>
+            </a:r>
+          </a:p>
+          <a:p>
+            <a:pPr>
+              <a:defRPr sz="1400"/>
+            </a:pPr>
+            <a:r>
+              <a:t>법률·컴플라이언스 승인, 보안 점검, 스마트컨트랙트·환불 운영 및 사고대응 증적 확보 전 외부 공개 보류</a:t>
+            </a:r>
+          </a:p>
+          <a:p>
+            <a:pPr>
+              <a:defRPr sz="1400"/>
+            </a:pPr>
+            <a:r>
+              <a:t>공식 채널 식별, 변경 공지 통제 및 채널 간 정보 일관성 검증 절차 추가</a:t>
+            </a:r>
+          </a:p>
+        </p:txBody>
+      </p:sp>
+    </p:spTree>
+  </p:cSld>
+  <p:clrMapOvr>
+    <a:masterClrMapping/>
+  </p:clrMapOvr>
+</p:sld>
+</file>
+
 <file path=ppt/slides/slide2.xml><?xml version="1.0" encoding="utf-8"?>
 <p:sld xmlns:a="http://schemas.openxmlformats.org/drawingml/2006/main" xmlns:p="http://schemas.openxmlformats.org/presentationml/2006/main" xmlns:r="http://schemas.openxmlformats.org/officeDocument/2006/relationships">
   <p:cSld>
@@ -3562,7 +3988,7 @@
           </a:p>
           <a:p>
             <a:r>
-              <a:t>세일 종료 후 2주내 상장 목표</a:t>
+              <a:t>후보 거래소 정보만 공개하며 확정 상장 표현 금지; 법률·컴플라이언스 검토 필요</a:t>
             </a:r>
           </a:p>
           <a:p>
@@ -3638,6 +4064,98 @@
           <a:p>
             <a:r>
               <a:t>법률자문단 상시 운영</a:t>
+            </a:r>
+          </a:p>
+        </p:txBody>
+      </p:sp>
+    </p:spTree>
+  </p:cSld>
+  <p:clrMapOvr>
+    <a:masterClrMapping/>
+  </p:clrMapOvr>
+</p:sld>
+</file>
+
+<file path=ppt/slides/slide9.xml><?xml version="1.0" encoding="utf-8"?>
+<p:sld xmlns:a="http://schemas.openxmlformats.org/drawingml/2006/main" xmlns:p="http://schemas.openxmlformats.org/presentationml/2006/main" xmlns:r="http://schemas.openxmlformats.org/officeDocument/2006/relationships">
+  <p:cSld>
+    <p:spTree>
+      <p:nvGrpSpPr>
+        <p:cNvPr id="1" name=""/>
+        <p:cNvGrpSpPr/>
+        <p:nvPr/>
+      </p:nvGrpSpPr>
+      <p:grpSpPr/>
+      <p:sp>
+        <p:nvSpPr>
+          <p:cNvPr id="2" name="Title 1"/>
+          <p:cNvSpPr>
+            <a:spLocks noGrp="1"/>
+          </p:cNvSpPr>
+          <p:nvPr>
+            <p:ph type="title"/>
+          </p:nvPr>
+        </p:nvSpPr>
+        <p:spPr/>
+        <p:txBody>
+          <a:bodyPr/>
+          <a:lstStyle/>
+          <a:p>
+            <a:r>
+              <a:t>변경 이력: 러시아 ETH 기반 VLB ICO 실행계획</a:t>
+            </a:r>
+          </a:p>
+        </p:txBody>
+      </p:sp>
+      <p:sp>
+        <p:nvSpPr>
+          <p:cNvPr id="3" name="Content Placeholder 2"/>
+          <p:cNvSpPr>
+            <a:spLocks noGrp="1"/>
+          </p:cNvSpPr>
+          <p:nvPr>
+            <p:ph idx="1"/>
+          </p:nvPr>
+        </p:nvSpPr>
+        <p:spPr/>
+        <p:txBody>
+          <a:bodyPr/>
+          <a:lstStyle/>
+          <a:p>
+            <a:r>
+              <a:t>러시아 시장·ETH 생태계 대상 마케팅 목표, 타깃, 메시지 및 채널 정의</a:t>
+            </a:r>
+          </a:p>
+          <a:p>
+            <a:pPr>
+              <a:defRPr sz="1400"/>
+            </a:pPr>
+            <a:r>
+              <a:t>공식 웹사이트·투자자 포털·검토된 커뮤니티 채널의 백서 배포와 버전·접근성 관리 반영</a:t>
+            </a:r>
+          </a:p>
+          <a:p>
+            <a:pPr>
+              <a:defRPr sz="1400"/>
+            </a:pPr>
+            <a:r>
+              <a:t>투자자 가입, 신원·거주지 확인, 서류, 심사 상태, 개인정보 처리 및 문의 대응을 포함한 KYC 안내 반영</a:t>
+            </a:r>
+          </a:p>
+          <a:p>
+            <a:pPr>
+              <a:defRPr sz="1400"/>
+            </a:pPr>
+            <a:r>
+              <a:t>사전등록과 단계별 토큰 세일 일정 및 변경사항의 공식 채널 공지 계획 반영</a:t>
+            </a:r>
+          </a:p>
+          <a:p>
+            <a:pPr>
+              <a:defRPr sz="1400"/>
+            </a:pPr>
+            <a:r>
+              <a:t>관할권·토큰 법적 분류·제재·KYC/AML·개인정보 처리 확정 및 법률·컴플라이언스 승인 전 외부 마케팅·세일 공지 금지</a:t>
             </a:r>
           </a:p>
         </p:txBody>
